--- a/Fase 2/Evidencias Proyecto/Presentacion_EasyStock.pptx
+++ b/Fase 2/Evidencias Proyecto/Presentacion_EasyStock.pptx
@@ -5764,7 +5764,7 @@
 </file>
 
 <file path=ppt/slides/slide1.xml><?xml version="1.0" encoding="utf-8"?>
-<p:sld xmlns:p="http://schemas.openxmlformats.org/presentationml/2006/main" xmlns:a="http://schemas.openxmlformats.org/drawingml/2006/main">
+<p:sld xmlns:p="http://schemas.openxmlformats.org/presentationml/2006/main" xmlns:a="http://schemas.openxmlformats.org/drawingml/2006/main" xmlns:r="http://schemas.openxmlformats.org/officeDocument/2006/relationships">
   <p:cSld>
     <p:bg>
       <p:bgPr>
@@ -6115,6 +6115,52 @@
             </a:r>
           </a:p>
         </p:txBody>
+      </p:sp>
+      <p:sp>
+        <p:nvSpPr>
+          <p:cNvPr name="Freeform 10" id="10"/>
+          <p:cNvSpPr/>
+          <p:nvPr/>
+        </p:nvSpPr>
+        <p:spPr>
+          <a:xfrm flipH="false" flipV="false" rot="0">
+            <a:off x="12868353" y="93704"/>
+            <a:ext cx="5419647" cy="1332330"/>
+          </a:xfrm>
+          <a:custGeom>
+            <a:avLst/>
+            <a:gdLst/>
+            <a:ahLst/>
+            <a:cxnLst/>
+            <a:rect r="r" b="b" t="t" l="l"/>
+            <a:pathLst>
+              <a:path h="1332330" w="5419647">
+                <a:moveTo>
+                  <a:pt x="0" y="0"/>
+                </a:moveTo>
+                <a:lnTo>
+                  <a:pt x="5419647" y="0"/>
+                </a:lnTo>
+                <a:lnTo>
+                  <a:pt x="5419647" y="1332329"/>
+                </a:lnTo>
+                <a:lnTo>
+                  <a:pt x="0" y="1332329"/>
+                </a:lnTo>
+                <a:lnTo>
+                  <a:pt x="0" y="0"/>
+                </a:lnTo>
+                <a:close/>
+              </a:path>
+            </a:pathLst>
+          </a:custGeom>
+          <a:blipFill>
+            <a:blip r:embed="rId3"/>
+            <a:stretch>
+              <a:fillRect l="0" t="0" r="0" b="0"/>
+            </a:stretch>
+          </a:blipFill>
+        </p:spPr>
       </p:sp>
     </p:spTree>
   </p:cSld>
@@ -7676,6 +7722,52 @@
           </a:p>
         </p:txBody>
       </p:sp>
+      <p:sp>
+        <p:nvSpPr>
+          <p:cNvPr name="Freeform 45" id="45"/>
+          <p:cNvSpPr/>
+          <p:nvPr/>
+        </p:nvSpPr>
+        <p:spPr>
+          <a:xfrm flipH="false" flipV="false" rot="0">
+            <a:off x="12868353" y="93704"/>
+            <a:ext cx="5419647" cy="1332330"/>
+          </a:xfrm>
+          <a:custGeom>
+            <a:avLst/>
+            <a:gdLst/>
+            <a:ahLst/>
+            <a:cxnLst/>
+            <a:rect r="r" b="b" t="t" l="l"/>
+            <a:pathLst>
+              <a:path h="1332330" w="5419647">
+                <a:moveTo>
+                  <a:pt x="0" y="0"/>
+                </a:moveTo>
+                <a:lnTo>
+                  <a:pt x="5419647" y="0"/>
+                </a:lnTo>
+                <a:lnTo>
+                  <a:pt x="5419647" y="1332329"/>
+                </a:lnTo>
+                <a:lnTo>
+                  <a:pt x="0" y="1332329"/>
+                </a:lnTo>
+                <a:lnTo>
+                  <a:pt x="0" y="0"/>
+                </a:lnTo>
+                <a:close/>
+              </a:path>
+            </a:pathLst>
+          </a:custGeom>
+          <a:blipFill>
+            <a:blip r:embed="rId4"/>
+            <a:stretch>
+              <a:fillRect l="0" t="0" r="0" b="0"/>
+            </a:stretch>
+          </a:blipFill>
+        </p:spPr>
+      </p:sp>
     </p:spTree>
   </p:cSld>
   <p:clrMapOvr>
@@ -7716,7 +7808,7 @@
         </p:nvGrpSpPr>
         <p:grpSpPr>
           <a:xfrm rot="0">
-            <a:off x="4378568" y="2353130"/>
+            <a:off x="5817117" y="2554527"/>
             <a:ext cx="16459200" cy="4694633"/>
             <a:chOff x="0" y="0"/>
             <a:chExt cx="21945600" cy="6259511"/>
@@ -7807,6 +7899,52 @@
           </p:txBody>
         </p:sp>
       </p:grpSp>
+      <p:sp>
+        <p:nvSpPr>
+          <p:cNvPr name="Freeform 5" id="5"/>
+          <p:cNvSpPr/>
+          <p:nvPr/>
+        </p:nvSpPr>
+        <p:spPr>
+          <a:xfrm flipH="false" flipV="false" rot="0">
+            <a:off x="12868353" y="93704"/>
+            <a:ext cx="5419647" cy="1332330"/>
+          </a:xfrm>
+          <a:custGeom>
+            <a:avLst/>
+            <a:gdLst/>
+            <a:ahLst/>
+            <a:cxnLst/>
+            <a:rect r="r" b="b" t="t" l="l"/>
+            <a:pathLst>
+              <a:path h="1332330" w="5419647">
+                <a:moveTo>
+                  <a:pt x="0" y="0"/>
+                </a:moveTo>
+                <a:lnTo>
+                  <a:pt x="5419647" y="0"/>
+                </a:lnTo>
+                <a:lnTo>
+                  <a:pt x="5419647" y="1332329"/>
+                </a:lnTo>
+                <a:lnTo>
+                  <a:pt x="0" y="1332329"/>
+                </a:lnTo>
+                <a:lnTo>
+                  <a:pt x="0" y="0"/>
+                </a:lnTo>
+                <a:close/>
+              </a:path>
+            </a:pathLst>
+          </a:custGeom>
+          <a:blipFill>
+            <a:blip r:embed="rId4"/>
+            <a:stretch>
+              <a:fillRect l="0" t="0" r="0" b="0"/>
+            </a:stretch>
+          </a:blipFill>
+        </p:spPr>
+      </p:sp>
     </p:spTree>
   </p:cSld>
   <p:clrMapOvr>
@@ -8471,6 +8609,52 @@
           </a:p>
         </p:txBody>
       </p:sp>
+      <p:sp>
+        <p:nvSpPr>
+          <p:cNvPr name="Freeform 18" id="18"/>
+          <p:cNvSpPr/>
+          <p:nvPr/>
+        </p:nvSpPr>
+        <p:spPr>
+          <a:xfrm flipH="false" flipV="false" rot="0">
+            <a:off x="12868353" y="93704"/>
+            <a:ext cx="5419647" cy="1332330"/>
+          </a:xfrm>
+          <a:custGeom>
+            <a:avLst/>
+            <a:gdLst/>
+            <a:ahLst/>
+            <a:cxnLst/>
+            <a:rect r="r" b="b" t="t" l="l"/>
+            <a:pathLst>
+              <a:path h="1332330" w="5419647">
+                <a:moveTo>
+                  <a:pt x="0" y="0"/>
+                </a:moveTo>
+                <a:lnTo>
+                  <a:pt x="5419647" y="0"/>
+                </a:lnTo>
+                <a:lnTo>
+                  <a:pt x="5419647" y="1332329"/>
+                </a:lnTo>
+                <a:lnTo>
+                  <a:pt x="0" y="1332329"/>
+                </a:lnTo>
+                <a:lnTo>
+                  <a:pt x="0" y="0"/>
+                </a:lnTo>
+                <a:close/>
+              </a:path>
+            </a:pathLst>
+          </a:custGeom>
+          <a:blipFill>
+            <a:blip r:embed="rId4"/>
+            <a:stretch>
+              <a:fillRect l="0" t="0" r="0" b="0"/>
+            </a:stretch>
+          </a:blipFill>
+        </p:spPr>
+      </p:sp>
     </p:spTree>
   </p:cSld>
   <p:clrMapOvr>
@@ -8504,10 +8688,10 @@
         </p:nvGrpSpPr>
         <p:grpSpPr>
           <a:xfrm rot="0">
-            <a:off x="914400" y="640080"/>
-            <a:ext cx="16459200" cy="1463040"/>
+            <a:off x="914400" y="-975716"/>
+            <a:ext cx="12805286" cy="4803500"/>
             <a:chOff x="0" y="0"/>
-            <a:chExt cx="21945600" cy="1950720"/>
+            <a:chExt cx="17073715" cy="6404666"/>
           </a:xfrm>
         </p:grpSpPr>
         <p:sp>
@@ -8519,7 +8703,7 @@
           <p:spPr>
             <a:xfrm flipH="false" flipV="false" rot="0">
               <a:off x="0" y="0"/>
-              <a:ext cx="21945600" cy="1950720"/>
+              <a:ext cx="17073714" cy="6404666"/>
             </a:xfrm>
             <a:custGeom>
               <a:avLst/>
@@ -8528,18 +8712,18 @@
               <a:cxnLst/>
               <a:rect r="r" b="b" t="t" l="l"/>
               <a:pathLst>
-                <a:path h="1950720" w="21945600">
+                <a:path h="6404666" w="17073714">
                   <a:moveTo>
                     <a:pt x="0" y="0"/>
                   </a:moveTo>
                   <a:lnTo>
-                    <a:pt x="21945600" y="0"/>
-                  </a:lnTo>
-                  <a:lnTo>
-                    <a:pt x="21945600" y="1950720"/>
-                  </a:lnTo>
-                  <a:lnTo>
-                    <a:pt x="0" y="1950720"/>
+                    <a:pt x="17073714" y="0"/>
+                  </a:lnTo>
+                  <a:lnTo>
+                    <a:pt x="17073714" y="6404666"/>
+                  </a:lnTo>
+                  <a:lnTo>
+                    <a:pt x="0" y="6404666"/>
                   </a:lnTo>
                   <a:close/>
                 </a:path>
@@ -8550,7 +8734,7 @@
                 <a:alphaModFix amt="0"/>
               </a:blip>
               <a:stretch>
-                <a:fillRect l="0" t="-169206" r="0" b="-169206"/>
+                <a:fillRect l="0" t="-51536" r="-28534" b="18005"/>
               </a:stretch>
             </a:blipFill>
           </p:spPr>
@@ -8564,7 +8748,7 @@
           <p:spPr>
             <a:xfrm>
               <a:off x="0" y="-9525"/>
-              <a:ext cx="21945600" cy="1960245"/>
+              <a:ext cx="17073715" cy="6414191"/>
             </a:xfrm>
             <a:prstGeom prst="rect">
               <a:avLst/>
@@ -9777,6 +9961,52 @@
           </a:p>
         </p:txBody>
       </p:sp>
+      <p:sp>
+        <p:nvSpPr>
+          <p:cNvPr name="Freeform 38" id="38"/>
+          <p:cNvSpPr/>
+          <p:nvPr/>
+        </p:nvSpPr>
+        <p:spPr>
+          <a:xfrm flipH="false" flipV="false" rot="0">
+            <a:off x="12868353" y="93704"/>
+            <a:ext cx="5419647" cy="1332330"/>
+          </a:xfrm>
+          <a:custGeom>
+            <a:avLst/>
+            <a:gdLst/>
+            <a:ahLst/>
+            <a:cxnLst/>
+            <a:rect r="r" b="b" t="t" l="l"/>
+            <a:pathLst>
+              <a:path h="1332330" w="5419647">
+                <a:moveTo>
+                  <a:pt x="0" y="0"/>
+                </a:moveTo>
+                <a:lnTo>
+                  <a:pt x="5419647" y="0"/>
+                </a:lnTo>
+                <a:lnTo>
+                  <a:pt x="5419647" y="1332329"/>
+                </a:lnTo>
+                <a:lnTo>
+                  <a:pt x="0" y="1332329"/>
+                </a:lnTo>
+                <a:lnTo>
+                  <a:pt x="0" y="0"/>
+                </a:lnTo>
+                <a:close/>
+              </a:path>
+            </a:pathLst>
+          </a:custGeom>
+          <a:blipFill>
+            <a:blip r:embed="rId4"/>
+            <a:stretch>
+              <a:fillRect l="0" t="0" r="0" b="0"/>
+            </a:stretch>
+          </a:blipFill>
+        </p:spPr>
+      </p:sp>
     </p:spTree>
   </p:cSld>
   <p:clrMapOvr>
@@ -9810,10 +10040,10 @@
         </p:nvGrpSpPr>
         <p:grpSpPr>
           <a:xfrm rot="0">
-            <a:off x="914400" y="640080"/>
-            <a:ext cx="16459200" cy="1463040"/>
+            <a:off x="914400" y="-975716"/>
+            <a:ext cx="3828742" cy="4694633"/>
             <a:chOff x="0" y="0"/>
-            <a:chExt cx="21945600" cy="1950720"/>
+            <a:chExt cx="5104990" cy="6259511"/>
           </a:xfrm>
         </p:grpSpPr>
         <p:sp>
@@ -9825,7 +10055,7 @@
           <p:spPr>
             <a:xfrm flipH="false" flipV="false" rot="0">
               <a:off x="0" y="0"/>
-              <a:ext cx="21945600" cy="1950720"/>
+              <a:ext cx="5104990" cy="6259511"/>
             </a:xfrm>
             <a:custGeom>
               <a:avLst/>
@@ -9834,18 +10064,18 @@
               <a:cxnLst/>
               <a:rect r="r" b="b" t="t" l="l"/>
               <a:pathLst>
-                <a:path h="1950720" w="21945600">
+                <a:path h="6259511" w="5104990">
                   <a:moveTo>
                     <a:pt x="0" y="0"/>
                   </a:moveTo>
                   <a:lnTo>
-                    <a:pt x="21945600" y="0"/>
-                  </a:lnTo>
-                  <a:lnTo>
-                    <a:pt x="21945600" y="1950720"/>
-                  </a:lnTo>
-                  <a:lnTo>
-                    <a:pt x="0" y="1950720"/>
+                    <a:pt x="5104990" y="0"/>
+                  </a:lnTo>
+                  <a:lnTo>
+                    <a:pt x="5104990" y="6259511"/>
+                  </a:lnTo>
+                  <a:lnTo>
+                    <a:pt x="0" y="6259511"/>
                   </a:lnTo>
                   <a:close/>
                 </a:path>
@@ -9856,7 +10086,7 @@
                 <a:alphaModFix amt="0"/>
               </a:blip>
               <a:stretch>
-                <a:fillRect l="0" t="-169206" r="0" b="-169206"/>
+                <a:fillRect l="0" t="-52731" r="-329885" b="16104"/>
               </a:stretch>
             </a:blipFill>
           </p:spPr>
@@ -9870,7 +10100,7 @@
           <p:spPr>
             <a:xfrm>
               <a:off x="0" y="-9525"/>
-              <a:ext cx="21945600" cy="1960245"/>
+              <a:ext cx="5104990" cy="6269036"/>
             </a:xfrm>
             <a:prstGeom prst="rect">
               <a:avLst/>
@@ -10991,6 +11221,52 @@
           </a:p>
         </p:txBody>
       </p:sp>
+      <p:sp>
+        <p:nvSpPr>
+          <p:cNvPr name="Freeform 34" id="34"/>
+          <p:cNvSpPr/>
+          <p:nvPr/>
+        </p:nvSpPr>
+        <p:spPr>
+          <a:xfrm flipH="false" flipV="false" rot="0">
+            <a:off x="12868353" y="93704"/>
+            <a:ext cx="5419647" cy="1332330"/>
+          </a:xfrm>
+          <a:custGeom>
+            <a:avLst/>
+            <a:gdLst/>
+            <a:ahLst/>
+            <a:cxnLst/>
+            <a:rect r="r" b="b" t="t" l="l"/>
+            <a:pathLst>
+              <a:path h="1332330" w="5419647">
+                <a:moveTo>
+                  <a:pt x="0" y="0"/>
+                </a:moveTo>
+                <a:lnTo>
+                  <a:pt x="5419647" y="0"/>
+                </a:lnTo>
+                <a:lnTo>
+                  <a:pt x="5419647" y="1332329"/>
+                </a:lnTo>
+                <a:lnTo>
+                  <a:pt x="0" y="1332329"/>
+                </a:lnTo>
+                <a:lnTo>
+                  <a:pt x="0" y="0"/>
+                </a:lnTo>
+                <a:close/>
+              </a:path>
+            </a:pathLst>
+          </a:custGeom>
+          <a:blipFill>
+            <a:blip r:embed="rId4"/>
+            <a:stretch>
+              <a:fillRect l="0" t="0" r="0" b="0"/>
+            </a:stretch>
+          </a:blipFill>
+        </p:spPr>
+      </p:sp>
     </p:spTree>
   </p:cSld>
   <p:clrMapOvr>
@@ -11024,10 +11300,10 @@
         </p:nvGrpSpPr>
         <p:grpSpPr>
           <a:xfrm rot="0">
-            <a:off x="914400" y="640080"/>
-            <a:ext cx="16459200" cy="1463040"/>
+            <a:off x="914400" y="-975716"/>
+            <a:ext cx="8806121" cy="4694633"/>
             <a:chOff x="0" y="0"/>
-            <a:chExt cx="21945600" cy="1950720"/>
+            <a:chExt cx="11741494" cy="6259511"/>
           </a:xfrm>
         </p:grpSpPr>
         <p:sp>
@@ -11039,7 +11315,7 @@
           <p:spPr>
             <a:xfrm flipH="false" flipV="false" rot="0">
               <a:off x="0" y="0"/>
-              <a:ext cx="21945600" cy="1950720"/>
+              <a:ext cx="11741494" cy="6259511"/>
             </a:xfrm>
             <a:custGeom>
               <a:avLst/>
@@ -11048,18 +11324,18 @@
               <a:cxnLst/>
               <a:rect r="r" b="b" t="t" l="l"/>
               <a:pathLst>
-                <a:path h="1950720" w="21945600">
+                <a:path h="6259511" w="11741494">
                   <a:moveTo>
                     <a:pt x="0" y="0"/>
                   </a:moveTo>
                   <a:lnTo>
-                    <a:pt x="21945600" y="0"/>
-                  </a:lnTo>
-                  <a:lnTo>
-                    <a:pt x="21945600" y="1950720"/>
-                  </a:lnTo>
-                  <a:lnTo>
-                    <a:pt x="0" y="1950720"/>
+                    <a:pt x="11741494" y="0"/>
+                  </a:lnTo>
+                  <a:lnTo>
+                    <a:pt x="11741494" y="6259511"/>
+                  </a:lnTo>
+                  <a:lnTo>
+                    <a:pt x="0" y="6259511"/>
                   </a:lnTo>
                   <a:close/>
                 </a:path>
@@ -11070,7 +11346,7 @@
                 <a:alphaModFix amt="0"/>
               </a:blip>
               <a:stretch>
-                <a:fillRect l="0" t="-169206" r="0" b="-169206"/>
+                <a:fillRect l="0" t="-52731" r="-86906" b="16104"/>
               </a:stretch>
             </a:blipFill>
           </p:spPr>
@@ -11084,7 +11360,7 @@
           <p:spPr>
             <a:xfrm>
               <a:off x="0" y="-9525"/>
-              <a:ext cx="21945600" cy="1960245"/>
+              <a:ext cx="11741494" cy="6269036"/>
             </a:xfrm>
             <a:prstGeom prst="rect">
               <a:avLst/>
@@ -12762,6 +13038,52 @@
           </a:p>
         </p:txBody>
       </p:sp>
+      <p:sp>
+        <p:nvSpPr>
+          <p:cNvPr name="Freeform 49" id="49"/>
+          <p:cNvSpPr/>
+          <p:nvPr/>
+        </p:nvSpPr>
+        <p:spPr>
+          <a:xfrm flipH="false" flipV="false" rot="0">
+            <a:off x="12868353" y="93704"/>
+            <a:ext cx="5419647" cy="1332330"/>
+          </a:xfrm>
+          <a:custGeom>
+            <a:avLst/>
+            <a:gdLst/>
+            <a:ahLst/>
+            <a:cxnLst/>
+            <a:rect r="r" b="b" t="t" l="l"/>
+            <a:pathLst>
+              <a:path h="1332330" w="5419647">
+                <a:moveTo>
+                  <a:pt x="0" y="0"/>
+                </a:moveTo>
+                <a:lnTo>
+                  <a:pt x="5419647" y="0"/>
+                </a:lnTo>
+                <a:lnTo>
+                  <a:pt x="5419647" y="1332329"/>
+                </a:lnTo>
+                <a:lnTo>
+                  <a:pt x="0" y="1332329"/>
+                </a:lnTo>
+                <a:lnTo>
+                  <a:pt x="0" y="0"/>
+                </a:lnTo>
+                <a:close/>
+              </a:path>
+            </a:pathLst>
+          </a:custGeom>
+          <a:blipFill>
+            <a:blip r:embed="rId4"/>
+            <a:stretch>
+              <a:fillRect l="0" t="0" r="0" b="0"/>
+            </a:stretch>
+          </a:blipFill>
+        </p:spPr>
+      </p:sp>
     </p:spTree>
   </p:cSld>
   <p:clrMapOvr>
@@ -12795,10 +13117,10 @@
         </p:nvGrpSpPr>
         <p:grpSpPr>
           <a:xfrm rot="0">
-            <a:off x="914400" y="640080"/>
-            <a:ext cx="16459200" cy="1463040"/>
+            <a:off x="914400" y="-975716"/>
+            <a:ext cx="8518411" cy="4694633"/>
             <a:chOff x="0" y="0"/>
-            <a:chExt cx="21945600" cy="1950720"/>
+            <a:chExt cx="11357882" cy="6259511"/>
           </a:xfrm>
         </p:grpSpPr>
         <p:sp>
@@ -12810,7 +13132,7 @@
           <p:spPr>
             <a:xfrm flipH="false" flipV="false" rot="0">
               <a:off x="0" y="0"/>
-              <a:ext cx="21945600" cy="1950720"/>
+              <a:ext cx="11357881" cy="6259511"/>
             </a:xfrm>
             <a:custGeom>
               <a:avLst/>
@@ -12819,18 +13141,18 @@
               <a:cxnLst/>
               <a:rect r="r" b="b" t="t" l="l"/>
               <a:pathLst>
-                <a:path h="1950720" w="21945600">
+                <a:path h="6259511" w="11357881">
                   <a:moveTo>
                     <a:pt x="0" y="0"/>
                   </a:moveTo>
                   <a:lnTo>
-                    <a:pt x="21945600" y="0"/>
-                  </a:lnTo>
-                  <a:lnTo>
-                    <a:pt x="21945600" y="1950720"/>
-                  </a:lnTo>
-                  <a:lnTo>
-                    <a:pt x="0" y="1950720"/>
+                    <a:pt x="11357881" y="0"/>
+                  </a:lnTo>
+                  <a:lnTo>
+                    <a:pt x="11357881" y="6259511"/>
+                  </a:lnTo>
+                  <a:lnTo>
+                    <a:pt x="0" y="6259511"/>
                   </a:lnTo>
                   <a:close/>
                 </a:path>
@@ -12841,7 +13163,7 @@
                 <a:alphaModFix amt="0"/>
               </a:blip>
               <a:stretch>
-                <a:fillRect l="0" t="-169206" r="0" b="-169206"/>
+                <a:fillRect l="0" t="-52731" r="-93219" b="16104"/>
               </a:stretch>
             </a:blipFill>
           </p:spPr>
@@ -12855,7 +13177,7 @@
           <p:spPr>
             <a:xfrm>
               <a:off x="0" y="-9525"/>
-              <a:ext cx="21945600" cy="1960245"/>
+              <a:ext cx="11357882" cy="6269036"/>
             </a:xfrm>
             <a:prstGeom prst="rect">
               <a:avLst/>
@@ -14124,6 +14446,52 @@
             </a:r>
           </a:p>
         </p:txBody>
+      </p:sp>
+      <p:sp>
+        <p:nvSpPr>
+          <p:cNvPr name="Freeform 37" id="37"/>
+          <p:cNvSpPr/>
+          <p:nvPr/>
+        </p:nvSpPr>
+        <p:spPr>
+          <a:xfrm flipH="false" flipV="false" rot="0">
+            <a:off x="12868353" y="93704"/>
+            <a:ext cx="5419647" cy="1332330"/>
+          </a:xfrm>
+          <a:custGeom>
+            <a:avLst/>
+            <a:gdLst/>
+            <a:ahLst/>
+            <a:cxnLst/>
+            <a:rect r="r" b="b" t="t" l="l"/>
+            <a:pathLst>
+              <a:path h="1332330" w="5419647">
+                <a:moveTo>
+                  <a:pt x="0" y="0"/>
+                </a:moveTo>
+                <a:lnTo>
+                  <a:pt x="5419647" y="0"/>
+                </a:lnTo>
+                <a:lnTo>
+                  <a:pt x="5419647" y="1332329"/>
+                </a:lnTo>
+                <a:lnTo>
+                  <a:pt x="0" y="1332329"/>
+                </a:lnTo>
+                <a:lnTo>
+                  <a:pt x="0" y="0"/>
+                </a:lnTo>
+                <a:close/>
+              </a:path>
+            </a:pathLst>
+          </a:custGeom>
+          <a:blipFill>
+            <a:blip r:embed="rId4"/>
+            <a:stretch>
+              <a:fillRect l="0" t="0" r="0" b="0"/>
+            </a:stretch>
+          </a:blipFill>
+        </p:spPr>
       </p:sp>
     </p:spTree>
   </p:cSld>
@@ -16154,6 +16522,52 @@
           </p:txBody>
         </p:sp>
       </p:grpSp>
+      <p:sp>
+        <p:nvSpPr>
+          <p:cNvPr name="Freeform 56" id="56"/>
+          <p:cNvSpPr/>
+          <p:nvPr/>
+        </p:nvSpPr>
+        <p:spPr>
+          <a:xfrm flipH="false" flipV="false" rot="0">
+            <a:off x="12868353" y="93704"/>
+            <a:ext cx="5419647" cy="1332330"/>
+          </a:xfrm>
+          <a:custGeom>
+            <a:avLst/>
+            <a:gdLst/>
+            <a:ahLst/>
+            <a:cxnLst/>
+            <a:rect r="r" b="b" t="t" l="l"/>
+            <a:pathLst>
+              <a:path h="1332330" w="5419647">
+                <a:moveTo>
+                  <a:pt x="0" y="0"/>
+                </a:moveTo>
+                <a:lnTo>
+                  <a:pt x="5419647" y="0"/>
+                </a:lnTo>
+                <a:lnTo>
+                  <a:pt x="5419647" y="1332329"/>
+                </a:lnTo>
+                <a:lnTo>
+                  <a:pt x="0" y="1332329"/>
+                </a:lnTo>
+                <a:lnTo>
+                  <a:pt x="0" y="0"/>
+                </a:lnTo>
+                <a:close/>
+              </a:path>
+            </a:pathLst>
+          </a:custGeom>
+          <a:blipFill>
+            <a:blip r:embed="rId4"/>
+            <a:stretch>
+              <a:fillRect l="0" t="0" r="0" b="0"/>
+            </a:stretch>
+          </a:blipFill>
+        </p:spPr>
+      </p:sp>
     </p:spTree>
   </p:cSld>
   <p:clrMapOvr>
@@ -17714,6 +18128,52 @@
           </a:p>
         </p:txBody>
       </p:sp>
+      <p:sp>
+        <p:nvSpPr>
+          <p:cNvPr name="Freeform 45" id="45"/>
+          <p:cNvSpPr/>
+          <p:nvPr/>
+        </p:nvSpPr>
+        <p:spPr>
+          <a:xfrm flipH="false" flipV="false" rot="0">
+            <a:off x="12868353" y="93704"/>
+            <a:ext cx="5419647" cy="1332330"/>
+          </a:xfrm>
+          <a:custGeom>
+            <a:avLst/>
+            <a:gdLst/>
+            <a:ahLst/>
+            <a:cxnLst/>
+            <a:rect r="r" b="b" t="t" l="l"/>
+            <a:pathLst>
+              <a:path h="1332330" w="5419647">
+                <a:moveTo>
+                  <a:pt x="0" y="0"/>
+                </a:moveTo>
+                <a:lnTo>
+                  <a:pt x="5419647" y="0"/>
+                </a:lnTo>
+                <a:lnTo>
+                  <a:pt x="5419647" y="1332329"/>
+                </a:lnTo>
+                <a:lnTo>
+                  <a:pt x="0" y="1332329"/>
+                </a:lnTo>
+                <a:lnTo>
+                  <a:pt x="0" y="0"/>
+                </a:lnTo>
+                <a:close/>
+              </a:path>
+            </a:pathLst>
+          </a:custGeom>
+          <a:blipFill>
+            <a:blip r:embed="rId4"/>
+            <a:stretch>
+              <a:fillRect l="0" t="0" r="0" b="0"/>
+            </a:stretch>
+          </a:blipFill>
+        </p:spPr>
+      </p:sp>
     </p:spTree>
   </p:cSld>
   <p:clrMapOvr>
@@ -19443,6 +19903,52 @@
             </a:r>
           </a:p>
         </p:txBody>
+      </p:sp>
+      <p:sp>
+        <p:nvSpPr>
+          <p:cNvPr name="Freeform 48" id="48"/>
+          <p:cNvSpPr/>
+          <p:nvPr/>
+        </p:nvSpPr>
+        <p:spPr>
+          <a:xfrm flipH="false" flipV="false" rot="0">
+            <a:off x="12868353" y="93704"/>
+            <a:ext cx="5419647" cy="1332330"/>
+          </a:xfrm>
+          <a:custGeom>
+            <a:avLst/>
+            <a:gdLst/>
+            <a:ahLst/>
+            <a:cxnLst/>
+            <a:rect r="r" b="b" t="t" l="l"/>
+            <a:pathLst>
+              <a:path h="1332330" w="5419647">
+                <a:moveTo>
+                  <a:pt x="0" y="0"/>
+                </a:moveTo>
+                <a:lnTo>
+                  <a:pt x="5419647" y="0"/>
+                </a:lnTo>
+                <a:lnTo>
+                  <a:pt x="5419647" y="1332329"/>
+                </a:lnTo>
+                <a:lnTo>
+                  <a:pt x="0" y="1332329"/>
+                </a:lnTo>
+                <a:lnTo>
+                  <a:pt x="0" y="0"/>
+                </a:lnTo>
+                <a:close/>
+              </a:path>
+            </a:pathLst>
+          </a:custGeom>
+          <a:blipFill>
+            <a:blip r:embed="rId4"/>
+            <a:stretch>
+              <a:fillRect l="0" t="0" r="0" b="0"/>
+            </a:stretch>
+          </a:blipFill>
+        </p:spPr>
       </p:sp>
     </p:spTree>
   </p:cSld>
